--- a/ProjectDocs/Presentation/GatewayGuard_FamilyPresentation_v3-2026-07-03.pptx
+++ b/ProjectDocs/Presentation/GatewayGuard_FamilyPresentation_v3-2026-07-03.pptx
@@ -1400,7 +1400,7 @@
           <a:p>
             <a:r>
               <a:rPr lang="en-US" dirty="0"/>
-              <a:t>One billion Windows 11 users worldwide. A $47.75 billion consumer security market. And zero tools that do what GatewayGuard does for home users. NoID charges $43 per device with no explanations. GatewayGuard at $19.99 serves the home user who just wants to be safe.</a:t>
+              <a:t>One billion Windows 11 users worldwide. A $47.75 billion consumer security market. GatewayGuard is aimed at the person who owns the PC rather than at a sysadmin. Comparable tools cost more and explain less. GatewayGuard at $19.99 serves the home user who just wants to be safe.</a:t>
             </a:r>
             <a:endParaRPr lang="en-US" dirty="0"/>
           </a:p>
@@ -1488,7 +1488,7 @@
           <a:p>
             <a:r>
               <a:rPr lang="en-US" dirty="0"/>
-              <a:t>Pricing is straightforward. Single PC $19.99 one-time. Multi-PC packs for families. Annual update subscriptions for recurring revenue. Assisted sessions — a real person helping you over screen share — for users who want human support. No competitor offers that last one at any price.</a:t>
+              <a:t>Pricing is straightforward. Single PC $19.99 one-time. Multi-PC packs for families. Optional annual updates at $12.99 a year -- optional, so not a subscription. Assisted sessions — a real person helping you over screen share — for users who want human support. Assisted sessions are on the roadmap and are not available today.</a:t>
             </a:r>
             <a:endParaRPr lang="en-US" dirty="0"/>
           </a:p>
@@ -1664,7 +1664,7 @@
           <a:p>
             <a:r>
               <a:rPr lang="en-US" dirty="0"/>
-              <a:t>Every statement is factual and defensible. No named competitors. The tagline refers to Microsoft Defender — built into every Windows 11 PC for free. The 2FA hook is powerful: blocks 99.9% of automated attacks, takes 5 minutes, costs nothing. GDPR angle: zero data by design, not policy.</a:t>
+              <a:t>Every statement is factual and defensible. One competitor is named, on slide 5, with its price sourced. The tagline refers to Microsoft Defender — built into every Windows 11 PC for free. The 2FA hook is powerful: blocks 99.9% of automated attacks, takes 5 minutes, costs nothing. GDPR angle: zero data by design, not policy.</a:t>
             </a:r>
             <a:endParaRPr lang="en-US" dirty="0"/>
           </a:p>
@@ -9581,7 +9581,7 @@
                 <a:ea typeface="Arial" pitchFamily="34" charset="-122"/>
                 <a:cs typeface="Arial" pitchFamily="34" charset="-120"/>
               </a:rPr>
-              <a:t>No competitor offers this.</a:t>
+              <a:t>Written for the person who owns the PC.</a:t>
             </a:r>
             <a:endParaRPr lang="en-US" sz="1100" dirty="0"/>
           </a:p>
@@ -11640,7 +11640,7 @@
                 <a:ea typeface="Arial" pitchFamily="34" charset="-122"/>
                 <a:cs typeface="Arial" pitchFamily="34" charset="-120"/>
               </a:rPr>
-              <a:t>Every competitor is a tool. We plan to offer a person, too. Assisted sessions are a future differentiator on our roadmap — no one else has this planned.</a:t>
+              <a:t>Every competitor is a tool. We plan to offer a person, too. Assisted sessions are a future differentiator on our roadmap — they are not available today.</a:t>
             </a:r>
             <a:endParaRPr lang="en-US" sz="1150" dirty="0"/>
           </a:p>
